--- a/system-design-101/vi/lessons/sd-09-005/slides/sd-09-005.pptx
+++ b/system-design-101/vi/lessons/sd-09-005/slides/sd-09-005.pptx
@@ -8435,7 +8435,7 @@
                 <a:ea typeface="Be Vietnam Pro" pitchFamily="34" charset="-122"/>
                 <a:cs typeface="Be Vietnam Pro" pitchFamily="34" charset="-120"/>
               </a:rPr>
-              <a:t>F′ thường có parent mới và ID mới. Lịch sử nhìn thẳng hơn.</a:t>
+              <a:t>F′ có parent mới, ID mới; lịch sử thẳng hơn.</a:t>
             </a:r>
             <a:endParaRPr lang="en-US" sz="2700" dirty="0"/>
           </a:p>
@@ -10405,7 +10405,7 @@
               <a:buNone/>
             </a:pPr>
             <a:r>
-              <a:rPr lang="en-US" sz="2250" b="1" dirty="0" spc="14" kern="0">
+              <a:rPr lang="en-US" sz="2250" b="1" dirty="0" spc="-29" kern="0">
                 <a:solidFill>
                   <a:srgbClr val="FF6A4D"/>
                 </a:solidFill>
@@ -10413,10 +10413,10 @@
                 <a:ea typeface="Be Vietnam Pro" pitchFamily="34" charset="-122"/>
                 <a:cs typeface="Be Vietnam Pro" pitchFamily="34" charset="-120"/>
               </a:rPr>
-              <a:t>Chưa</a:t>
-            </a:r>
-            <a:r>
-              <a:rPr lang="en-US" sz="2250" b="1" dirty="0" spc="-6" kern="0">
+              <a:t>Tránh</a:t>
+            </a:r>
+            <a:r>
+              <a:rPr lang="en-US" sz="2250" b="1" dirty="0" spc="-9" kern="0">
                 <a:solidFill>
                   <a:srgbClr val="FF6A4D"/>
                 </a:solidFill>
@@ -10424,43 +10424,10 @@
                 <a:ea typeface="Be Vietnam Pro" pitchFamily="34" charset="-122"/>
                 <a:cs typeface="Be Vietnam Pro" pitchFamily="34" charset="-120"/>
               </a:rPr>
-              <a:t> thống</a:t>
-            </a:r>
-            <a:r>
-              <a:rPr lang="en-US" sz="2250" b="1" dirty="0" spc="-4" kern="0">
-                <a:solidFill>
-                  <a:srgbClr val="FF6A4D"/>
-                </a:solidFill>
-                <a:latin typeface="Be Vietnam Pro" pitchFamily="34" charset="0"/>
-                <a:ea typeface="Be Vietnam Pro" pitchFamily="34" charset="-122"/>
-                <a:cs typeface="Be Vietnam Pro" pitchFamily="34" charset="-120"/>
-              </a:rPr>
-              <a:t> nhất?</a:t>
-            </a:r>
-            <a:r>
-              <a:rPr lang="en-US" sz="2250" b="1" dirty="0" spc="-23" kern="0">
-                <a:solidFill>
-                  <a:srgbClr val="FF6A4D"/>
-                </a:solidFill>
-                <a:latin typeface="Be Vietnam Pro" pitchFamily="34" charset="0"/>
-                <a:ea typeface="Be Vietnam Pro" pitchFamily="34" charset="-122"/>
-                <a:cs typeface="Be Vietnam Pro" pitchFamily="34" charset="-120"/>
-              </a:rPr>
-              <a:t> Tránh</a:t>
-            </a:r>
-            <a:r>
-              <a:rPr lang="en-US" sz="2250" b="1" dirty="0" spc="-10" kern="0">
-                <a:solidFill>
-                  <a:srgbClr val="FF6A4D"/>
-                </a:solidFill>
-                <a:latin typeface="Be Vietnam Pro" pitchFamily="34" charset="0"/>
-                <a:ea typeface="Be Vietnam Pro" pitchFamily="34" charset="-122"/>
-                <a:cs typeface="Be Vietnam Pro" pitchFamily="34" charset="-120"/>
-              </a:rPr>
               <a:t> rebase</a:t>
             </a:r>
             <a:r>
-              <a:rPr lang="en-US" sz="2250" b="1" dirty="0" spc="4" kern="0">
+              <a:rPr lang="en-US" sz="2250" b="1" dirty="0" spc="3" kern="0">
                 <a:solidFill>
                   <a:srgbClr val="FF6A4D"/>
                 </a:solidFill>
